--- a/презентация.pptx
+++ b/презентация.pptx
@@ -1,9 +1,12 @@
 
 <file path=ppt/presentation.xml><?xml version="1.0" encoding="utf-8"?>
-<p:presentation xmlns:a="http://schemas.openxmlformats.org/drawingml/2006/main" xmlns:r="http://schemas.openxmlformats.org/officeDocument/2006/relationships" xmlns:p="http://schemas.openxmlformats.org/presentationml/2006/main" saveSubsetFonts="1">
+<p:presentation xmlns:a="http://schemas.openxmlformats.org/drawingml/2006/main" xmlns:r="http://schemas.openxmlformats.org/officeDocument/2006/relationships" xmlns:p="http://schemas.openxmlformats.org/presentationml/2006/main" showSpecialPlsOnTitleSld="0" saveSubsetFonts="1">
   <p:sldMasterIdLst>
     <p:sldMasterId id="2147483648" r:id="rId1"/>
   </p:sldMasterIdLst>
+  <p:notesMasterIdLst>
+    <p:notesMasterId r:id="rId13"/>
+  </p:notesMasterIdLst>
   <p:sldIdLst>
     <p:sldId id="256" r:id="rId2"/>
     <p:sldId id="257" r:id="rId3"/>
@@ -12,6 +15,10 @@
     <p:sldId id="259" r:id="rId6"/>
     <p:sldId id="260" r:id="rId7"/>
     <p:sldId id="262" r:id="rId8"/>
+    <p:sldId id="263" r:id="rId9"/>
+    <p:sldId id="264" r:id="rId10"/>
+    <p:sldId id="265" r:id="rId11"/>
+    <p:sldId id="266" r:id="rId12"/>
   </p:sldIdLst>
   <p:sldSz cx="9144000" cy="6858000" type="screen4x3"/>
   <p:notesSz cx="6858000" cy="9144000"/>
@@ -113,6 +120,353 @@
 </p:presentation>
 </file>
 
+<file path=ppt/notesMasters/notesMaster1.xml><?xml version="1.0" encoding="utf-8"?>
+<p:notesMaster xmlns:a="http://schemas.openxmlformats.org/drawingml/2006/main" xmlns:r="http://schemas.openxmlformats.org/officeDocument/2006/relationships" xmlns:p="http://schemas.openxmlformats.org/presentationml/2006/main">
+  <p:cSld>
+    <p:bg>
+      <p:bgRef idx="1001">
+        <a:schemeClr val="bg1"/>
+      </p:bgRef>
+    </p:bg>
+    <p:spTree>
+      <p:nvGrpSpPr>
+        <p:cNvPr id="1" name=""/>
+        <p:cNvGrpSpPr/>
+        <p:nvPr/>
+      </p:nvGrpSpPr>
+      <p:grpSpPr>
+        <a:xfrm>
+          <a:off x="0" y="0"/>
+          <a:ext cx="0" cy="0"/>
+          <a:chOff x="0" y="0"/>
+          <a:chExt cx="0" cy="0"/>
+        </a:xfrm>
+      </p:grpSpPr>
+      <p:sp>
+        <p:nvSpPr>
+          <p:cNvPr id="2" name="Верхний колонтитул 1"/>
+          <p:cNvSpPr>
+            <a:spLocks noGrp="1"/>
+          </p:cNvSpPr>
+          <p:nvPr>
+            <p:ph type="hdr" sz="quarter"/>
+          </p:nvPr>
+        </p:nvSpPr>
+        <p:spPr>
+          <a:xfrm>
+            <a:off x="0" y="0"/>
+            <a:ext cx="2971800" cy="457200"/>
+          </a:xfrm>
+          <a:prstGeom prst="rect">
+            <a:avLst/>
+          </a:prstGeom>
+        </p:spPr>
+        <p:txBody>
+          <a:bodyPr vert="horz" lIns="91440" tIns="45720" rIns="91440" bIns="45720" rtlCol="0"/>
+          <a:lstStyle>
+            <a:lvl1pPr algn="l">
+              <a:defRPr sz="1200"/>
+            </a:lvl1pPr>
+          </a:lstStyle>
+          <a:p>
+            <a:endParaRPr lang="ru-RU"/>
+          </a:p>
+        </p:txBody>
+      </p:sp>
+      <p:sp>
+        <p:nvSpPr>
+          <p:cNvPr id="3" name="Дата 2"/>
+          <p:cNvSpPr>
+            <a:spLocks noGrp="1"/>
+          </p:cNvSpPr>
+          <p:nvPr>
+            <p:ph type="dt" idx="1"/>
+          </p:nvPr>
+        </p:nvSpPr>
+        <p:spPr>
+          <a:xfrm>
+            <a:off x="3884613" y="0"/>
+            <a:ext cx="2971800" cy="457200"/>
+          </a:xfrm>
+          <a:prstGeom prst="rect">
+            <a:avLst/>
+          </a:prstGeom>
+        </p:spPr>
+        <p:txBody>
+          <a:bodyPr vert="horz" lIns="91440" tIns="45720" rIns="91440" bIns="45720" rtlCol="0"/>
+          <a:lstStyle>
+            <a:lvl1pPr algn="r">
+              <a:defRPr sz="1200"/>
+            </a:lvl1pPr>
+          </a:lstStyle>
+          <a:p>
+            <a:fld id="{DA5F5C9C-9A6B-4452-A2D0-1C6A2998FBEE}" type="datetimeFigureOut">
+              <a:rPr lang="ru-RU" smtClean="0"/>
+              <a:t>25.12.2024</a:t>
+            </a:fld>
+            <a:endParaRPr lang="ru-RU"/>
+          </a:p>
+        </p:txBody>
+      </p:sp>
+      <p:sp>
+        <p:nvSpPr>
+          <p:cNvPr id="4" name="Образ слайда 3"/>
+          <p:cNvSpPr>
+            <a:spLocks noGrp="1" noRot="1" noChangeAspect="1"/>
+          </p:cNvSpPr>
+          <p:nvPr>
+            <p:ph type="sldImg" idx="2"/>
+          </p:nvPr>
+        </p:nvSpPr>
+        <p:spPr>
+          <a:xfrm>
+            <a:off x="1143000" y="685800"/>
+            <a:ext cx="4572000" cy="3429000"/>
+          </a:xfrm>
+          <a:prstGeom prst="rect">
+            <a:avLst/>
+          </a:prstGeom>
+          <a:noFill/>
+          <a:ln w="12700">
+            <a:solidFill>
+              <a:prstClr val="black"/>
+            </a:solidFill>
+          </a:ln>
+        </p:spPr>
+        <p:txBody>
+          <a:bodyPr vert="horz" lIns="91440" tIns="45720" rIns="91440" bIns="45720" rtlCol="0" anchor="ctr"/>
+          <a:lstStyle/>
+          <a:p>
+            <a:endParaRPr lang="ru-RU"/>
+          </a:p>
+        </p:txBody>
+      </p:sp>
+      <p:sp>
+        <p:nvSpPr>
+          <p:cNvPr id="5" name="Заметки 4"/>
+          <p:cNvSpPr>
+            <a:spLocks noGrp="1"/>
+          </p:cNvSpPr>
+          <p:nvPr>
+            <p:ph type="body" sz="quarter" idx="3"/>
+          </p:nvPr>
+        </p:nvSpPr>
+        <p:spPr>
+          <a:xfrm>
+            <a:off x="685800" y="4343400"/>
+            <a:ext cx="5486400" cy="4114800"/>
+          </a:xfrm>
+          <a:prstGeom prst="rect">
+            <a:avLst/>
+          </a:prstGeom>
+        </p:spPr>
+        <p:txBody>
+          <a:bodyPr vert="horz" lIns="91440" tIns="45720" rIns="91440" bIns="45720" rtlCol="0">
+            <a:normAutofit/>
+          </a:bodyPr>
+          <a:lstStyle/>
+          <a:p>
+            <a:pPr lvl="0"/>
+            <a:r>
+              <a:rPr lang="ru-RU" smtClean="0"/>
+              <a:t>Образец текста</a:t>
+            </a:r>
+          </a:p>
+          <a:p>
+            <a:pPr lvl="1"/>
+            <a:r>
+              <a:rPr lang="ru-RU" smtClean="0"/>
+              <a:t>Второй уровень</a:t>
+            </a:r>
+          </a:p>
+          <a:p>
+            <a:pPr lvl="2"/>
+            <a:r>
+              <a:rPr lang="ru-RU" smtClean="0"/>
+              <a:t>Третий уровень</a:t>
+            </a:r>
+          </a:p>
+          <a:p>
+            <a:pPr lvl="3"/>
+            <a:r>
+              <a:rPr lang="ru-RU" smtClean="0"/>
+              <a:t>Четвертый уровень</a:t>
+            </a:r>
+          </a:p>
+          <a:p>
+            <a:pPr lvl="4"/>
+            <a:r>
+              <a:rPr lang="ru-RU" smtClean="0"/>
+              <a:t>Пятый уровень</a:t>
+            </a:r>
+            <a:endParaRPr lang="ru-RU"/>
+          </a:p>
+        </p:txBody>
+      </p:sp>
+      <p:sp>
+        <p:nvSpPr>
+          <p:cNvPr id="6" name="Нижний колонтитул 5"/>
+          <p:cNvSpPr>
+            <a:spLocks noGrp="1"/>
+          </p:cNvSpPr>
+          <p:nvPr>
+            <p:ph type="ftr" sz="quarter" idx="4"/>
+          </p:nvPr>
+        </p:nvSpPr>
+        <p:spPr>
+          <a:xfrm>
+            <a:off x="0" y="8685213"/>
+            <a:ext cx="2971800" cy="457200"/>
+          </a:xfrm>
+          <a:prstGeom prst="rect">
+            <a:avLst/>
+          </a:prstGeom>
+        </p:spPr>
+        <p:txBody>
+          <a:bodyPr vert="horz" lIns="91440" tIns="45720" rIns="91440" bIns="45720" rtlCol="0" anchor="b"/>
+          <a:lstStyle>
+            <a:lvl1pPr algn="l">
+              <a:defRPr sz="1200"/>
+            </a:lvl1pPr>
+          </a:lstStyle>
+          <a:p>
+            <a:endParaRPr lang="ru-RU"/>
+          </a:p>
+        </p:txBody>
+      </p:sp>
+      <p:sp>
+        <p:nvSpPr>
+          <p:cNvPr id="7" name="Номер слайда 6"/>
+          <p:cNvSpPr>
+            <a:spLocks noGrp="1"/>
+          </p:cNvSpPr>
+          <p:nvPr>
+            <p:ph type="sldNum" sz="quarter" idx="5"/>
+          </p:nvPr>
+        </p:nvSpPr>
+        <p:spPr>
+          <a:xfrm>
+            <a:off x="3884613" y="8685213"/>
+            <a:ext cx="2971800" cy="457200"/>
+          </a:xfrm>
+          <a:prstGeom prst="rect">
+            <a:avLst/>
+          </a:prstGeom>
+        </p:spPr>
+        <p:txBody>
+          <a:bodyPr vert="horz" lIns="91440" tIns="45720" rIns="91440" bIns="45720" rtlCol="0" anchor="b"/>
+          <a:lstStyle>
+            <a:lvl1pPr algn="r">
+              <a:defRPr sz="1200"/>
+            </a:lvl1pPr>
+          </a:lstStyle>
+          <a:p>
+            <a:fld id="{304565AE-14A3-491C-AB34-8FB9AA1FBBB8}" type="slidenum">
+              <a:rPr lang="ru-RU" smtClean="0"/>
+              <a:t>‹#›</a:t>
+            </a:fld>
+            <a:endParaRPr lang="ru-RU"/>
+          </a:p>
+        </p:txBody>
+      </p:sp>
+    </p:spTree>
+  </p:cSld>
+  <p:clrMap bg1="lt1" tx1="dk1" bg2="lt2" tx2="dk2" accent1="accent1" accent2="accent2" accent3="accent3" accent4="accent4" accent5="accent5" accent6="accent6" hlink="hlink" folHlink="folHlink"/>
+  <p:notesStyle>
+    <a:lvl1pPr marL="0" algn="l" defTabSz="914400" rtl="0" eaLnBrk="1" latinLnBrk="0" hangingPunct="1">
+      <a:defRPr sz="1200" kern="1200">
+        <a:solidFill>
+          <a:schemeClr val="tx1"/>
+        </a:solidFill>
+        <a:latin typeface="+mn-lt"/>
+        <a:ea typeface="+mn-ea"/>
+        <a:cs typeface="+mn-cs"/>
+      </a:defRPr>
+    </a:lvl1pPr>
+    <a:lvl2pPr marL="457200" algn="l" defTabSz="914400" rtl="0" eaLnBrk="1" latinLnBrk="0" hangingPunct="1">
+      <a:defRPr sz="1200" kern="1200">
+        <a:solidFill>
+          <a:schemeClr val="tx1"/>
+        </a:solidFill>
+        <a:latin typeface="+mn-lt"/>
+        <a:ea typeface="+mn-ea"/>
+        <a:cs typeface="+mn-cs"/>
+      </a:defRPr>
+    </a:lvl2pPr>
+    <a:lvl3pPr marL="914400" algn="l" defTabSz="914400" rtl="0" eaLnBrk="1" latinLnBrk="0" hangingPunct="1">
+      <a:defRPr sz="1200" kern="1200">
+        <a:solidFill>
+          <a:schemeClr val="tx1"/>
+        </a:solidFill>
+        <a:latin typeface="+mn-lt"/>
+        <a:ea typeface="+mn-ea"/>
+        <a:cs typeface="+mn-cs"/>
+      </a:defRPr>
+    </a:lvl3pPr>
+    <a:lvl4pPr marL="1371600" algn="l" defTabSz="914400" rtl="0" eaLnBrk="1" latinLnBrk="0" hangingPunct="1">
+      <a:defRPr sz="1200" kern="1200">
+        <a:solidFill>
+          <a:schemeClr val="tx1"/>
+        </a:solidFill>
+        <a:latin typeface="+mn-lt"/>
+        <a:ea typeface="+mn-ea"/>
+        <a:cs typeface="+mn-cs"/>
+      </a:defRPr>
+    </a:lvl4pPr>
+    <a:lvl5pPr marL="1828800" algn="l" defTabSz="914400" rtl="0" eaLnBrk="1" latinLnBrk="0" hangingPunct="1">
+      <a:defRPr sz="1200" kern="1200">
+        <a:solidFill>
+          <a:schemeClr val="tx1"/>
+        </a:solidFill>
+        <a:latin typeface="+mn-lt"/>
+        <a:ea typeface="+mn-ea"/>
+        <a:cs typeface="+mn-cs"/>
+      </a:defRPr>
+    </a:lvl5pPr>
+    <a:lvl6pPr marL="2286000" algn="l" defTabSz="914400" rtl="0" eaLnBrk="1" latinLnBrk="0" hangingPunct="1">
+      <a:defRPr sz="1200" kern="1200">
+        <a:solidFill>
+          <a:schemeClr val="tx1"/>
+        </a:solidFill>
+        <a:latin typeface="+mn-lt"/>
+        <a:ea typeface="+mn-ea"/>
+        <a:cs typeface="+mn-cs"/>
+      </a:defRPr>
+    </a:lvl6pPr>
+    <a:lvl7pPr marL="2743200" algn="l" defTabSz="914400" rtl="0" eaLnBrk="1" latinLnBrk="0" hangingPunct="1">
+      <a:defRPr sz="1200" kern="1200">
+        <a:solidFill>
+          <a:schemeClr val="tx1"/>
+        </a:solidFill>
+        <a:latin typeface="+mn-lt"/>
+        <a:ea typeface="+mn-ea"/>
+        <a:cs typeface="+mn-cs"/>
+      </a:defRPr>
+    </a:lvl7pPr>
+    <a:lvl8pPr marL="3200400" algn="l" defTabSz="914400" rtl="0" eaLnBrk="1" latinLnBrk="0" hangingPunct="1">
+      <a:defRPr sz="1200" kern="1200">
+        <a:solidFill>
+          <a:schemeClr val="tx1"/>
+        </a:solidFill>
+        <a:latin typeface="+mn-lt"/>
+        <a:ea typeface="+mn-ea"/>
+        <a:cs typeface="+mn-cs"/>
+      </a:defRPr>
+    </a:lvl8pPr>
+    <a:lvl9pPr marL="3657600" algn="l" defTabSz="914400" rtl="0" eaLnBrk="1" latinLnBrk="0" hangingPunct="1">
+      <a:defRPr sz="1200" kern="1200">
+        <a:solidFill>
+          <a:schemeClr val="tx1"/>
+        </a:solidFill>
+        <a:latin typeface="+mn-lt"/>
+        <a:ea typeface="+mn-ea"/>
+        <a:cs typeface="+mn-cs"/>
+      </a:defRPr>
+    </a:lvl9pPr>
+  </p:notesStyle>
+</p:notesMaster>
+</file>
+
 <file path=ppt/slideLayouts/slideLayout1.xml><?xml version="1.0" encoding="utf-8"?>
 <p:sldLayout xmlns:a="http://schemas.openxmlformats.org/drawingml/2006/main" xmlns:r="http://schemas.openxmlformats.org/officeDocument/2006/relationships" xmlns:p="http://schemas.openxmlformats.org/presentationml/2006/main" type="title" preserve="1">
   <p:cSld name="Титульный слайд">
@@ -292,9 +646,9 @@
           <a:bodyPr/>
           <a:lstStyle/>
           <a:p>
-            <a:fld id="{E1C74907-642D-457E-8327-16C22C006F1A}" type="datetimeFigureOut">
-              <a:rPr lang="ru-RU" smtClean="0"/>
-              <a:t>24.12.2024</a:t>
+            <a:fld id="{DDD12ADB-EF9E-4D33-BF82-4AB91E27E28F}" type="datetime1">
+              <a:rPr lang="ru-RU" smtClean="0"/>
+              <a:t>25.12.2024</a:t>
             </a:fld>
             <a:endParaRPr lang="ru-RU"/>
           </a:p>
@@ -336,6 +690,7 @@
           <a:p>
             <a:fld id="{8D0CB543-272A-46F8-AA1A-C85E29F11575}" type="slidenum">
               <a:rPr lang="ru-RU" smtClean="0"/>
+              <a:pPr/>
               <a:t>‹#›</a:t>
             </a:fld>
             <a:endParaRPr lang="ru-RU"/>
@@ -457,9 +812,9 @@
           <a:bodyPr/>
           <a:lstStyle/>
           <a:p>
-            <a:fld id="{E1C74907-642D-457E-8327-16C22C006F1A}" type="datetimeFigureOut">
-              <a:rPr lang="ru-RU" smtClean="0"/>
-              <a:t>24.12.2024</a:t>
+            <a:fld id="{922AB569-EF43-4016-989F-18328C6C2719}" type="datetime1">
+              <a:rPr lang="ru-RU" smtClean="0"/>
+              <a:t>25.12.2024</a:t>
             </a:fld>
             <a:endParaRPr lang="ru-RU"/>
           </a:p>
@@ -501,6 +856,7 @@
           <a:p>
             <a:fld id="{8D0CB543-272A-46F8-AA1A-C85E29F11575}" type="slidenum">
               <a:rPr lang="ru-RU" smtClean="0"/>
+              <a:pPr/>
               <a:t>‹#›</a:t>
             </a:fld>
             <a:endParaRPr lang="ru-RU"/>
@@ -632,9 +988,9 @@
           <a:bodyPr/>
           <a:lstStyle/>
           <a:p>
-            <a:fld id="{E1C74907-642D-457E-8327-16C22C006F1A}" type="datetimeFigureOut">
-              <a:rPr lang="ru-RU" smtClean="0"/>
-              <a:t>24.12.2024</a:t>
+            <a:fld id="{56A22265-7CDA-4AAC-A798-EC4B2E91A43C}" type="datetime1">
+              <a:rPr lang="ru-RU" smtClean="0"/>
+              <a:t>25.12.2024</a:t>
             </a:fld>
             <a:endParaRPr lang="ru-RU"/>
           </a:p>
@@ -676,6 +1032,7 @@
           <a:p>
             <a:fld id="{8D0CB543-272A-46F8-AA1A-C85E29F11575}" type="slidenum">
               <a:rPr lang="ru-RU" smtClean="0"/>
+              <a:pPr/>
               <a:t>‹#›</a:t>
             </a:fld>
             <a:endParaRPr lang="ru-RU"/>
@@ -797,9 +1154,9 @@
           <a:bodyPr/>
           <a:lstStyle/>
           <a:p>
-            <a:fld id="{E1C74907-642D-457E-8327-16C22C006F1A}" type="datetimeFigureOut">
-              <a:rPr lang="ru-RU" smtClean="0"/>
-              <a:t>24.12.2024</a:t>
+            <a:fld id="{C1598F53-538F-41C6-BEBC-DAFF81716BEC}" type="datetime1">
+              <a:rPr lang="ru-RU" smtClean="0"/>
+              <a:t>25.12.2024</a:t>
             </a:fld>
             <a:endParaRPr lang="ru-RU"/>
           </a:p>
@@ -841,6 +1198,7 @@
           <a:p>
             <a:fld id="{8D0CB543-272A-46F8-AA1A-C85E29F11575}" type="slidenum">
               <a:rPr lang="ru-RU" smtClean="0"/>
+              <a:pPr/>
               <a:t>‹#›</a:t>
             </a:fld>
             <a:endParaRPr lang="ru-RU"/>
@@ -1038,9 +1396,9 @@
           <a:bodyPr/>
           <a:lstStyle/>
           <a:p>
-            <a:fld id="{E1C74907-642D-457E-8327-16C22C006F1A}" type="datetimeFigureOut">
-              <a:rPr lang="ru-RU" smtClean="0"/>
-              <a:t>24.12.2024</a:t>
+            <a:fld id="{65C3FA9B-B34A-45F1-8FD1-FD2BDA6428C5}" type="datetime1">
+              <a:rPr lang="ru-RU" smtClean="0"/>
+              <a:t>25.12.2024</a:t>
             </a:fld>
             <a:endParaRPr lang="ru-RU"/>
           </a:p>
@@ -1082,6 +1440,7 @@
           <a:p>
             <a:fld id="{8D0CB543-272A-46F8-AA1A-C85E29F11575}" type="slidenum">
               <a:rPr lang="ru-RU" smtClean="0"/>
+              <a:pPr/>
               <a:t>‹#›</a:t>
             </a:fld>
             <a:endParaRPr lang="ru-RU"/>
@@ -1321,9 +1680,9 @@
           <a:bodyPr/>
           <a:lstStyle/>
           <a:p>
-            <a:fld id="{E1C74907-642D-457E-8327-16C22C006F1A}" type="datetimeFigureOut">
-              <a:rPr lang="ru-RU" smtClean="0"/>
-              <a:t>24.12.2024</a:t>
+            <a:fld id="{F98732D8-37F7-4F04-9A53-5CAE9F7A7BE1}" type="datetime1">
+              <a:rPr lang="ru-RU" smtClean="0"/>
+              <a:t>25.12.2024</a:t>
             </a:fld>
             <a:endParaRPr lang="ru-RU"/>
           </a:p>
@@ -1365,6 +1724,7 @@
           <a:p>
             <a:fld id="{8D0CB543-272A-46F8-AA1A-C85E29F11575}" type="slidenum">
               <a:rPr lang="ru-RU" smtClean="0"/>
+              <a:pPr/>
               <a:t>‹#›</a:t>
             </a:fld>
             <a:endParaRPr lang="ru-RU"/>
@@ -1738,9 +2098,9 @@
           <a:bodyPr/>
           <a:lstStyle/>
           <a:p>
-            <a:fld id="{E1C74907-642D-457E-8327-16C22C006F1A}" type="datetimeFigureOut">
-              <a:rPr lang="ru-RU" smtClean="0"/>
-              <a:t>24.12.2024</a:t>
+            <a:fld id="{13C7572F-FEF0-439A-ACF3-996A1BE07AAA}" type="datetime1">
+              <a:rPr lang="ru-RU" smtClean="0"/>
+              <a:t>25.12.2024</a:t>
             </a:fld>
             <a:endParaRPr lang="ru-RU"/>
           </a:p>
@@ -1782,6 +2142,7 @@
           <a:p>
             <a:fld id="{8D0CB543-272A-46F8-AA1A-C85E29F11575}" type="slidenum">
               <a:rPr lang="ru-RU" smtClean="0"/>
+              <a:pPr/>
               <a:t>‹#›</a:t>
             </a:fld>
             <a:endParaRPr lang="ru-RU"/>
@@ -1851,9 +2212,9 @@
           <a:bodyPr/>
           <a:lstStyle/>
           <a:p>
-            <a:fld id="{E1C74907-642D-457E-8327-16C22C006F1A}" type="datetimeFigureOut">
-              <a:rPr lang="ru-RU" smtClean="0"/>
-              <a:t>24.12.2024</a:t>
+            <a:fld id="{A388FE2D-2CD8-448E-A3E4-5DFDB5CFC67D}" type="datetime1">
+              <a:rPr lang="ru-RU" smtClean="0"/>
+              <a:t>25.12.2024</a:t>
             </a:fld>
             <a:endParaRPr lang="ru-RU"/>
           </a:p>
@@ -1895,6 +2256,7 @@
           <a:p>
             <a:fld id="{8D0CB543-272A-46F8-AA1A-C85E29F11575}" type="slidenum">
               <a:rPr lang="ru-RU" smtClean="0"/>
+              <a:pPr/>
               <a:t>‹#›</a:t>
             </a:fld>
             <a:endParaRPr lang="ru-RU"/>
@@ -1941,9 +2303,9 @@
           <a:bodyPr/>
           <a:lstStyle/>
           <a:p>
-            <a:fld id="{E1C74907-642D-457E-8327-16C22C006F1A}" type="datetimeFigureOut">
-              <a:rPr lang="ru-RU" smtClean="0"/>
-              <a:t>24.12.2024</a:t>
+            <a:fld id="{C1D826C1-7624-4BE3-B95B-67E8D8E3D694}" type="datetime1">
+              <a:rPr lang="ru-RU" smtClean="0"/>
+              <a:t>25.12.2024</a:t>
             </a:fld>
             <a:endParaRPr lang="ru-RU"/>
           </a:p>
@@ -1985,6 +2347,7 @@
           <a:p>
             <a:fld id="{8D0CB543-272A-46F8-AA1A-C85E29F11575}" type="slidenum">
               <a:rPr lang="ru-RU" smtClean="0"/>
+              <a:pPr/>
               <a:t>‹#›</a:t>
             </a:fld>
             <a:endParaRPr lang="ru-RU"/>
@@ -2213,9 +2576,9 @@
           <a:bodyPr/>
           <a:lstStyle/>
           <a:p>
-            <a:fld id="{E1C74907-642D-457E-8327-16C22C006F1A}" type="datetimeFigureOut">
-              <a:rPr lang="ru-RU" smtClean="0"/>
-              <a:t>24.12.2024</a:t>
+            <a:fld id="{B2065FF3-DBFC-463E-9BBC-82116122D678}" type="datetime1">
+              <a:rPr lang="ru-RU" smtClean="0"/>
+              <a:t>25.12.2024</a:t>
             </a:fld>
             <a:endParaRPr lang="ru-RU"/>
           </a:p>
@@ -2257,6 +2620,7 @@
           <a:p>
             <a:fld id="{8D0CB543-272A-46F8-AA1A-C85E29F11575}" type="slidenum">
               <a:rPr lang="ru-RU" smtClean="0"/>
+              <a:pPr/>
               <a:t>‹#›</a:t>
             </a:fld>
             <a:endParaRPr lang="ru-RU"/>
@@ -2461,9 +2825,9 @@
           <a:bodyPr/>
           <a:lstStyle/>
           <a:p>
-            <a:fld id="{E1C74907-642D-457E-8327-16C22C006F1A}" type="datetimeFigureOut">
-              <a:rPr lang="ru-RU" smtClean="0"/>
-              <a:t>24.12.2024</a:t>
+            <a:fld id="{6FE77FB3-2846-4F41-988B-DCD4CA8D097D}" type="datetime1">
+              <a:rPr lang="ru-RU" smtClean="0"/>
+              <a:t>25.12.2024</a:t>
             </a:fld>
             <a:endParaRPr lang="ru-RU"/>
           </a:p>
@@ -2505,6 +2869,7 @@
           <a:p>
             <a:fld id="{8D0CB543-272A-46F8-AA1A-C85E29F11575}" type="slidenum">
               <a:rPr lang="ru-RU" smtClean="0"/>
+              <a:pPr/>
               <a:t>‹#›</a:t>
             </a:fld>
             <a:endParaRPr lang="ru-RU"/>
@@ -2669,9 +3034,9 @@
             </a:lvl1pPr>
           </a:lstStyle>
           <a:p>
-            <a:fld id="{E1C74907-642D-457E-8327-16C22C006F1A}" type="datetimeFigureOut">
-              <a:rPr lang="ru-RU" smtClean="0"/>
-              <a:t>24.12.2024</a:t>
+            <a:fld id="{9D8F13CA-A937-4CAE-9C3B-9ACD2B136DF4}" type="datetime1">
+              <a:rPr lang="ru-RU" smtClean="0"/>
+              <a:t>25.12.2024</a:t>
             </a:fld>
             <a:endParaRPr lang="ru-RU"/>
           </a:p>
@@ -2749,6 +3114,7 @@
           <a:p>
             <a:fld id="{8D0CB543-272A-46F8-AA1A-C85E29F11575}" type="slidenum">
               <a:rPr lang="ru-RU" smtClean="0"/>
+              <a:pPr/>
               <a:t>‹#›</a:t>
             </a:fld>
             <a:endParaRPr lang="ru-RU"/>
@@ -2771,6 +3137,7 @@
     <p:sldLayoutId id="2147483658" r:id="rId10"/>
     <p:sldLayoutId id="2147483659" r:id="rId11"/>
   </p:sldLayoutIdLst>
+  <p:hf hdr="0" ftr="0" dt="0"/>
   <p:txStyles>
     <p:titleStyle>
       <a:lvl1pPr algn="ctr" defTabSz="914400" rtl="0" eaLnBrk="1" latinLnBrk="0" hangingPunct="1">
@@ -3117,11 +3484,11 @@
               </a:rPr>
             </a:br>
             <a:r>
-              <a:rPr lang="ru-RU" dirty="0" smtClean="0">
+              <a:rPr lang="ru-RU" u="sng" dirty="0" smtClean="0">
                 <a:latin typeface="Times New Roman" pitchFamily="18" charset="0"/>
                 <a:cs typeface="Times New Roman" pitchFamily="18" charset="0"/>
               </a:rPr>
-              <a:t>СУБД           </a:t>
+              <a:t>Системы управления базами данных          </a:t>
             </a:r>
             <a:r>
               <a:rPr lang="ru-RU" dirty="0">
@@ -3170,20 +3537,20 @@
               </a:rPr>
             </a:br>
             <a:r>
-              <a:rPr lang="ru-RU" dirty="0" smtClean="0">
+              <a:rPr lang="ru-RU" u="sng" dirty="0" smtClean="0">
                 <a:latin typeface="Times New Roman" pitchFamily="18" charset="0"/>
                 <a:cs typeface="Times New Roman" pitchFamily="18" charset="0"/>
               </a:rPr>
               <a:t>АИС </a:t>
             </a:r>
             <a:r>
-              <a:rPr lang="ru-RU" dirty="0">
+              <a:rPr lang="ru-RU" u="sng" dirty="0">
                 <a:latin typeface="Times New Roman" pitchFamily="18" charset="0"/>
                 <a:cs typeface="Times New Roman" pitchFamily="18" charset="0"/>
               </a:rPr>
               <a:t>подписного пункта</a:t>
             </a:r>
-            <a:endParaRPr lang="ru-RU" i="1" dirty="0">
+            <a:endParaRPr lang="ru-RU" i="1" u="sng" dirty="0">
               <a:latin typeface="Times New Roman" pitchFamily="18" charset="0"/>
               <a:cs typeface="Times New Roman" pitchFamily="18" charset="0"/>
             </a:endParaRPr>
@@ -3233,6 +3600,572 @@
           </a:p>
         </p:txBody>
       </p:sp>
+    </p:spTree>
+  </p:cSld>
+  <p:clrMapOvr>
+    <a:masterClrMapping/>
+  </p:clrMapOvr>
+</p:sld>
+</file>
+
+<file path=ppt/slides/slide10.xml><?xml version="1.0" encoding="utf-8"?>
+<p:sld xmlns:a="http://schemas.openxmlformats.org/drawingml/2006/main" xmlns:r="http://schemas.openxmlformats.org/officeDocument/2006/relationships" xmlns:p="http://schemas.openxmlformats.org/presentationml/2006/main">
+  <p:cSld>
+    <p:spTree>
+      <p:nvGrpSpPr>
+        <p:cNvPr id="1" name=""/>
+        <p:cNvGrpSpPr/>
+        <p:nvPr/>
+      </p:nvGrpSpPr>
+      <p:grpSpPr>
+        <a:xfrm>
+          <a:off x="0" y="0"/>
+          <a:ext cx="0" cy="0"/>
+          <a:chOff x="0" y="0"/>
+          <a:chExt cx="0" cy="0"/>
+        </a:xfrm>
+      </p:grpSpPr>
+      <p:sp>
+        <p:nvSpPr>
+          <p:cNvPr id="4" name="Номер слайда 3"/>
+          <p:cNvSpPr>
+            <a:spLocks noGrp="1"/>
+          </p:cNvSpPr>
+          <p:nvPr>
+            <p:ph type="sldNum" sz="quarter" idx="12"/>
+          </p:nvPr>
+        </p:nvSpPr>
+        <p:spPr/>
+        <p:txBody>
+          <a:bodyPr/>
+          <a:lstStyle/>
+          <a:p>
+            <a:fld id="{8D0CB543-272A-46F8-AA1A-C85E29F11575}" type="slidenum">
+              <a:rPr lang="ru-RU" smtClean="0"/>
+              <a:pPr/>
+              <a:t>10</a:t>
+            </a:fld>
+            <a:endParaRPr lang="ru-RU"/>
+          </a:p>
+        </p:txBody>
+      </p:sp>
+      <p:sp>
+        <p:nvSpPr>
+          <p:cNvPr id="5" name="Прямоугольник 4"/>
+          <p:cNvSpPr/>
+          <p:nvPr/>
+        </p:nvSpPr>
+        <p:spPr>
+          <a:xfrm>
+            <a:off x="0" y="116632"/>
+            <a:ext cx="9252520" cy="954107"/>
+          </a:xfrm>
+          <a:prstGeom prst="rect">
+            <a:avLst/>
+          </a:prstGeom>
+        </p:spPr>
+        <p:txBody>
+          <a:bodyPr wrap="square">
+            <a:spAutoFit/>
+          </a:bodyPr>
+          <a:lstStyle/>
+          <a:p>
+            <a:r>
+              <a:rPr lang="en-US" dirty="0" smtClean="0"/>
+              <a:t>"</a:t>
+            </a:r>
+            <a:r>
+              <a:rPr lang="en-US" sz="2800" dirty="0" smtClean="0">
+                <a:latin typeface="Courier New" pitchFamily="49" charset="0"/>
+                <a:cs typeface="Courier New" pitchFamily="49" charset="0"/>
+              </a:rPr>
+              <a:t>DELETE FROM public.{</a:t>
+            </a:r>
+            <a:r>
+              <a:rPr lang="en-US" sz="2800" dirty="0" err="1" smtClean="0">
+                <a:latin typeface="Courier New" pitchFamily="49" charset="0"/>
+                <a:cs typeface="Courier New" pitchFamily="49" charset="0"/>
+              </a:rPr>
+              <a:t>currentTable</a:t>
+            </a:r>
+            <a:r>
+              <a:rPr lang="en-US" sz="2800" dirty="0" smtClean="0">
+                <a:latin typeface="Courier New" pitchFamily="49" charset="0"/>
+                <a:cs typeface="Courier New" pitchFamily="49" charset="0"/>
+              </a:rPr>
+              <a:t>} WHERE id = @id"</a:t>
+            </a:r>
+            <a:endParaRPr lang="ru-RU" sz="2800" dirty="0">
+              <a:latin typeface="Courier New" pitchFamily="49" charset="0"/>
+              <a:cs typeface="Courier New" pitchFamily="49" charset="0"/>
+            </a:endParaRPr>
+          </a:p>
+        </p:txBody>
+      </p:sp>
+      <p:pic>
+        <p:nvPicPr>
+          <p:cNvPr id="3074" name="Picture 2"/>
+          <p:cNvPicPr>
+            <a:picLocks noChangeAspect="1" noChangeArrowheads="1"/>
+          </p:cNvPicPr>
+          <p:nvPr/>
+        </p:nvPicPr>
+        <p:blipFill>
+          <a:blip r:embed="rId2" cstate="print"/>
+          <a:srcRect/>
+          <a:stretch>
+            <a:fillRect/>
+          </a:stretch>
+        </p:blipFill>
+        <p:spPr bwMode="auto">
+          <a:xfrm>
+            <a:off x="1547664" y="980728"/>
+            <a:ext cx="5696795" cy="5400600"/>
+          </a:xfrm>
+          <a:prstGeom prst="rect">
+            <a:avLst/>
+          </a:prstGeom>
+          <a:noFill/>
+          <a:ln w="9525">
+            <a:noFill/>
+            <a:miter lim="800000"/>
+            <a:headEnd/>
+            <a:tailEnd/>
+          </a:ln>
+          <a:effectLst/>
+        </p:spPr>
+      </p:pic>
+    </p:spTree>
+  </p:cSld>
+  <p:clrMapOvr>
+    <a:masterClrMapping/>
+  </p:clrMapOvr>
+</p:sld>
+</file>
+
+<file path=ppt/slides/slide11.xml><?xml version="1.0" encoding="utf-8"?>
+<p:sld xmlns:a="http://schemas.openxmlformats.org/drawingml/2006/main" xmlns:r="http://schemas.openxmlformats.org/officeDocument/2006/relationships" xmlns:p="http://schemas.openxmlformats.org/presentationml/2006/main">
+  <p:cSld>
+    <p:spTree>
+      <p:nvGrpSpPr>
+        <p:cNvPr id="1" name=""/>
+        <p:cNvGrpSpPr/>
+        <p:nvPr/>
+      </p:nvGrpSpPr>
+      <p:grpSpPr>
+        <a:xfrm>
+          <a:off x="0" y="0"/>
+          <a:ext cx="0" cy="0"/>
+          <a:chOff x="0" y="0"/>
+          <a:chExt cx="0" cy="0"/>
+        </a:xfrm>
+      </p:grpSpPr>
+      <p:sp>
+        <p:nvSpPr>
+          <p:cNvPr id="4" name="Номер слайда 3"/>
+          <p:cNvSpPr>
+            <a:spLocks noGrp="1"/>
+          </p:cNvSpPr>
+          <p:nvPr>
+            <p:ph type="sldNum" sz="quarter" idx="12"/>
+          </p:nvPr>
+        </p:nvSpPr>
+        <p:spPr/>
+        <p:txBody>
+          <a:bodyPr/>
+          <a:lstStyle/>
+          <a:p>
+            <a:fld id="{8D0CB543-272A-46F8-AA1A-C85E29F11575}" type="slidenum">
+              <a:rPr lang="ru-RU" smtClean="0"/>
+              <a:pPr/>
+              <a:t>11</a:t>
+            </a:fld>
+            <a:endParaRPr lang="ru-RU"/>
+          </a:p>
+        </p:txBody>
+      </p:sp>
+      <p:sp>
+        <p:nvSpPr>
+          <p:cNvPr id="5" name="Прямоугольник 4"/>
+          <p:cNvSpPr/>
+          <p:nvPr/>
+        </p:nvSpPr>
+        <p:spPr>
+          <a:xfrm>
+            <a:off x="0" y="0"/>
+            <a:ext cx="7920880" cy="3416320"/>
+          </a:xfrm>
+          <a:prstGeom prst="rect">
+            <a:avLst/>
+          </a:prstGeom>
+        </p:spPr>
+        <p:txBody>
+          <a:bodyPr wrap="square">
+            <a:spAutoFit/>
+          </a:bodyPr>
+          <a:lstStyle/>
+          <a:p>
+            <a:r>
+              <a:rPr lang="en-US" dirty="0" smtClean="0">
+                <a:latin typeface="Courier New" pitchFamily="49" charset="0"/>
+                <a:cs typeface="Courier New" pitchFamily="49" charset="0"/>
+              </a:rPr>
+              <a:t>if (</a:t>
+            </a:r>
+            <a:r>
+              <a:rPr lang="en-US" dirty="0" err="1" smtClean="0">
+                <a:latin typeface="Courier New" pitchFamily="49" charset="0"/>
+                <a:cs typeface="Courier New" pitchFamily="49" charset="0"/>
+              </a:rPr>
+              <a:t>tableName</a:t>
+            </a:r>
+            <a:r>
+              <a:rPr lang="en-US" dirty="0" smtClean="0">
+                <a:latin typeface="Courier New" pitchFamily="49" charset="0"/>
+                <a:cs typeface="Courier New" pitchFamily="49" charset="0"/>
+              </a:rPr>
+              <a:t> == "\"Journals</a:t>
+            </a:r>
+            <a:r>
+              <a:rPr lang="en-US" dirty="0" smtClean="0">
+                <a:latin typeface="Courier New" pitchFamily="49" charset="0"/>
+                <a:cs typeface="Courier New" pitchFamily="49" charset="0"/>
+              </a:rPr>
+              <a:t>\"") {</a:t>
+            </a:r>
+            <a:r>
+              <a:rPr lang="ru-RU" dirty="0" smtClean="0">
+                <a:latin typeface="Courier New" pitchFamily="49" charset="0"/>
+                <a:cs typeface="Courier New" pitchFamily="49" charset="0"/>
+              </a:rPr>
+              <a:t> </a:t>
+            </a:r>
+            <a:r>
+              <a:rPr lang="en-US" dirty="0" smtClean="0">
+                <a:latin typeface="Courier New" pitchFamily="49" charset="0"/>
+                <a:cs typeface="Courier New" pitchFamily="49" charset="0"/>
+              </a:rPr>
+              <a:t>return </a:t>
+            </a:r>
+            <a:endParaRPr lang="ru-RU" dirty="0" smtClean="0">
+              <a:latin typeface="Courier New" pitchFamily="49" charset="0"/>
+              <a:cs typeface="Courier New" pitchFamily="49" charset="0"/>
+            </a:endParaRPr>
+          </a:p>
+          <a:p>
+            <a:endParaRPr lang="ru-RU" dirty="0" smtClean="0">
+              <a:latin typeface="Courier New" pitchFamily="49" charset="0"/>
+              <a:cs typeface="Courier New" pitchFamily="49" charset="0"/>
+            </a:endParaRPr>
+          </a:p>
+          <a:p>
+            <a:r>
+              <a:rPr lang="en-US" dirty="0" smtClean="0">
+                <a:latin typeface="Courier New" pitchFamily="49" charset="0"/>
+                <a:cs typeface="Courier New" pitchFamily="49" charset="0"/>
+              </a:rPr>
+              <a:t>@"</a:t>
+            </a:r>
+            <a:r>
+              <a:rPr lang="en-US" dirty="0" smtClean="0">
+                <a:latin typeface="Courier New" pitchFamily="49" charset="0"/>
+                <a:cs typeface="Courier New" pitchFamily="49" charset="0"/>
+              </a:rPr>
+              <a:t>SELECT j.id,</a:t>
+            </a:r>
+          </a:p>
+          <a:p>
+            <a:r>
+              <a:rPr lang="ru-RU" dirty="0" smtClean="0">
+                <a:latin typeface="Courier New" pitchFamily="49" charset="0"/>
+                <a:cs typeface="Courier New" pitchFamily="49" charset="0"/>
+              </a:rPr>
+              <a:t>	</a:t>
+            </a:r>
+            <a:r>
+              <a:rPr lang="en-US" dirty="0" smtClean="0">
+                <a:latin typeface="Courier New" pitchFamily="49" charset="0"/>
+                <a:cs typeface="Courier New" pitchFamily="49" charset="0"/>
+              </a:rPr>
+              <a:t>j</a:t>
+            </a:r>
+            <a:r>
+              <a:rPr lang="en-US" dirty="0" smtClean="0">
+                <a:latin typeface="Courier New" pitchFamily="49" charset="0"/>
+                <a:cs typeface="Courier New" pitchFamily="49" charset="0"/>
+              </a:rPr>
+              <a:t>.""Name"" AS ""</a:t>
+            </a:r>
+            <a:r>
+              <a:rPr lang="ru-RU" dirty="0" smtClean="0">
+                <a:latin typeface="Courier New" pitchFamily="49" charset="0"/>
+                <a:cs typeface="Courier New" pitchFamily="49" charset="0"/>
+              </a:rPr>
+              <a:t>Название"",</a:t>
+            </a:r>
+          </a:p>
+          <a:p>
+            <a:r>
+              <a:rPr lang="ru-RU" dirty="0" smtClean="0">
+                <a:latin typeface="Courier New" pitchFamily="49" charset="0"/>
+                <a:cs typeface="Courier New" pitchFamily="49" charset="0"/>
+              </a:rPr>
+              <a:t>	</a:t>
+            </a:r>
+            <a:r>
+              <a:rPr lang="en-US" dirty="0" smtClean="0">
+                <a:latin typeface="Courier New" pitchFamily="49" charset="0"/>
+                <a:cs typeface="Courier New" pitchFamily="49" charset="0"/>
+              </a:rPr>
+              <a:t>p</a:t>
+            </a:r>
+            <a:r>
+              <a:rPr lang="en-US" dirty="0" smtClean="0">
+                <a:latin typeface="Courier New" pitchFamily="49" charset="0"/>
+                <a:cs typeface="Courier New" pitchFamily="49" charset="0"/>
+              </a:rPr>
+              <a:t>.""Name"" AS ""</a:t>
+            </a:r>
+            <a:r>
+              <a:rPr lang="ru-RU" dirty="0" smtClean="0">
+                <a:latin typeface="Courier New" pitchFamily="49" charset="0"/>
+                <a:cs typeface="Courier New" pitchFamily="49" charset="0"/>
+              </a:rPr>
+              <a:t>Издатель"",</a:t>
+            </a:r>
+          </a:p>
+          <a:p>
+            <a:r>
+              <a:rPr lang="ru-RU" dirty="0" smtClean="0">
+                <a:latin typeface="Courier New" pitchFamily="49" charset="0"/>
+                <a:cs typeface="Courier New" pitchFamily="49" charset="0"/>
+              </a:rPr>
+              <a:t>	</a:t>
+            </a:r>
+            <a:r>
+              <a:rPr lang="ru-RU" dirty="0" err="1" smtClean="0">
+                <a:latin typeface="Courier New" pitchFamily="49" charset="0"/>
+                <a:cs typeface="Courier New" pitchFamily="49" charset="0"/>
+              </a:rPr>
+              <a:t>j</a:t>
+            </a:r>
+            <a:r>
+              <a:rPr lang="ru-RU" dirty="0" smtClean="0">
+                <a:latin typeface="Courier New" pitchFamily="49" charset="0"/>
+                <a:cs typeface="Courier New" pitchFamily="49" charset="0"/>
+              </a:rPr>
+              <a:t>.""</a:t>
+            </a:r>
+            <a:r>
+              <a:rPr lang="ru-RU" dirty="0" err="1" smtClean="0">
+                <a:latin typeface="Courier New" pitchFamily="49" charset="0"/>
+                <a:cs typeface="Courier New" pitchFamily="49" charset="0"/>
+              </a:rPr>
+              <a:t>LastArrival</a:t>
+            </a:r>
+            <a:r>
+              <a:rPr lang="ru-RU" dirty="0" smtClean="0">
+                <a:latin typeface="Courier New" pitchFamily="49" charset="0"/>
+                <a:cs typeface="Courier New" pitchFamily="49" charset="0"/>
+              </a:rPr>
+              <a:t>"" AS ""Последнее поступление"",</a:t>
+            </a:r>
+          </a:p>
+          <a:p>
+            <a:r>
+              <a:rPr lang="ru-RU" dirty="0" smtClean="0">
+                <a:latin typeface="Courier New" pitchFamily="49" charset="0"/>
+                <a:cs typeface="Courier New" pitchFamily="49" charset="0"/>
+              </a:rPr>
+              <a:t>	</a:t>
+            </a:r>
+            <a:r>
+              <a:rPr lang="en-US" dirty="0" smtClean="0">
+                <a:latin typeface="Courier New" pitchFamily="49" charset="0"/>
+                <a:cs typeface="Courier New" pitchFamily="49" charset="0"/>
+              </a:rPr>
+              <a:t>j</a:t>
+            </a:r>
+            <a:r>
+              <a:rPr lang="en-US" dirty="0" smtClean="0">
+                <a:latin typeface="Courier New" pitchFamily="49" charset="0"/>
+                <a:cs typeface="Courier New" pitchFamily="49" charset="0"/>
+              </a:rPr>
+              <a:t>.""</a:t>
+            </a:r>
+            <a:r>
+              <a:rPr lang="en-US" dirty="0" err="1" smtClean="0">
+                <a:latin typeface="Courier New" pitchFamily="49" charset="0"/>
+                <a:cs typeface="Courier New" pitchFamily="49" charset="0"/>
+              </a:rPr>
+              <a:t>ReleasePeriod</a:t>
+            </a:r>
+            <a:r>
+              <a:rPr lang="en-US" dirty="0" smtClean="0">
+                <a:latin typeface="Courier New" pitchFamily="49" charset="0"/>
+                <a:cs typeface="Courier New" pitchFamily="49" charset="0"/>
+              </a:rPr>
+              <a:t>"" AS ""</a:t>
+            </a:r>
+            <a:r>
+              <a:rPr lang="ru-RU" dirty="0" smtClean="0">
+                <a:latin typeface="Courier New" pitchFamily="49" charset="0"/>
+                <a:cs typeface="Courier New" pitchFamily="49" charset="0"/>
+              </a:rPr>
+              <a:t>Периодичность"",</a:t>
+            </a:r>
+          </a:p>
+          <a:p>
+            <a:r>
+              <a:rPr lang="ru-RU" dirty="0" smtClean="0">
+                <a:latin typeface="Courier New" pitchFamily="49" charset="0"/>
+                <a:cs typeface="Courier New" pitchFamily="49" charset="0"/>
+              </a:rPr>
+              <a:t>	</a:t>
+            </a:r>
+            <a:r>
+              <a:rPr lang="en-US" dirty="0" smtClean="0">
+                <a:latin typeface="Courier New" pitchFamily="49" charset="0"/>
+                <a:cs typeface="Courier New" pitchFamily="49" charset="0"/>
+              </a:rPr>
+              <a:t>j</a:t>
+            </a:r>
+            <a:r>
+              <a:rPr lang="en-US" dirty="0" smtClean="0">
+                <a:latin typeface="Courier New" pitchFamily="49" charset="0"/>
+                <a:cs typeface="Courier New" pitchFamily="49" charset="0"/>
+              </a:rPr>
+              <a:t>.""Logo"" AS ""</a:t>
+            </a:r>
+            <a:r>
+              <a:rPr lang="ru-RU" dirty="0" smtClean="0">
+                <a:latin typeface="Courier New" pitchFamily="49" charset="0"/>
+                <a:cs typeface="Courier New" pitchFamily="49" charset="0"/>
+              </a:rPr>
+              <a:t>Лого""</a:t>
+            </a:r>
+          </a:p>
+          <a:p>
+            <a:r>
+              <a:rPr lang="en-US" dirty="0" smtClean="0">
+                <a:latin typeface="Courier New" pitchFamily="49" charset="0"/>
+                <a:cs typeface="Courier New" pitchFamily="49" charset="0"/>
+              </a:rPr>
+              <a:t>FROM </a:t>
+            </a:r>
+            <a:r>
+              <a:rPr lang="en-US" dirty="0" smtClean="0">
+                <a:latin typeface="Courier New" pitchFamily="49" charset="0"/>
+                <a:cs typeface="Courier New" pitchFamily="49" charset="0"/>
+              </a:rPr>
+              <a:t>public.""Journals"" j</a:t>
+            </a:r>
+          </a:p>
+          <a:p>
+            <a:r>
+              <a:rPr lang="en-US" dirty="0" smtClean="0">
+                <a:latin typeface="Courier New" pitchFamily="49" charset="0"/>
+                <a:cs typeface="Courier New" pitchFamily="49" charset="0"/>
+              </a:rPr>
+              <a:t>JOIN </a:t>
+            </a:r>
+            <a:r>
+              <a:rPr lang="en-US" dirty="0" smtClean="0">
+                <a:latin typeface="Courier New" pitchFamily="49" charset="0"/>
+                <a:cs typeface="Courier New" pitchFamily="49" charset="0"/>
+              </a:rPr>
+              <a:t>public.""Publishers"" p </a:t>
+            </a:r>
+            <a:endParaRPr lang="ru-RU" dirty="0" smtClean="0">
+              <a:latin typeface="Courier New" pitchFamily="49" charset="0"/>
+              <a:cs typeface="Courier New" pitchFamily="49" charset="0"/>
+            </a:endParaRPr>
+          </a:p>
+          <a:p>
+            <a:r>
+              <a:rPr lang="en-US" dirty="0" smtClean="0">
+                <a:latin typeface="Courier New" pitchFamily="49" charset="0"/>
+                <a:cs typeface="Courier New" pitchFamily="49" charset="0"/>
+              </a:rPr>
+              <a:t>ON </a:t>
+            </a:r>
+            <a:r>
+              <a:rPr lang="en-US" dirty="0" smtClean="0">
+                <a:latin typeface="Courier New" pitchFamily="49" charset="0"/>
+                <a:cs typeface="Courier New" pitchFamily="49" charset="0"/>
+              </a:rPr>
+              <a:t>j.""</a:t>
+            </a:r>
+            <a:r>
+              <a:rPr lang="en-US" dirty="0" err="1" smtClean="0">
+                <a:latin typeface="Courier New" pitchFamily="49" charset="0"/>
+                <a:cs typeface="Courier New" pitchFamily="49" charset="0"/>
+              </a:rPr>
+              <a:t>PublisherID</a:t>
+            </a:r>
+            <a:r>
+              <a:rPr lang="en-US" dirty="0" smtClean="0">
+                <a:latin typeface="Courier New" pitchFamily="49" charset="0"/>
+                <a:cs typeface="Courier New" pitchFamily="49" charset="0"/>
+              </a:rPr>
+              <a:t>"" = p.id</a:t>
+            </a:r>
+            <a:r>
+              <a:rPr lang="en-US" dirty="0" smtClean="0">
+                <a:latin typeface="Courier New" pitchFamily="49" charset="0"/>
+                <a:cs typeface="Courier New" pitchFamily="49" charset="0"/>
+              </a:rPr>
+              <a:t>;";</a:t>
+            </a:r>
+          </a:p>
+          <a:p>
+            <a:r>
+              <a:rPr lang="en-US" dirty="0" smtClean="0">
+                <a:latin typeface="Courier New" pitchFamily="49" charset="0"/>
+                <a:cs typeface="Courier New" pitchFamily="49" charset="0"/>
+              </a:rPr>
+              <a:t>}</a:t>
+            </a:r>
+            <a:endParaRPr lang="ru-RU" dirty="0">
+              <a:latin typeface="Courier New" pitchFamily="49" charset="0"/>
+              <a:cs typeface="Courier New" pitchFamily="49" charset="0"/>
+            </a:endParaRPr>
+          </a:p>
+        </p:txBody>
+      </p:sp>
+      <p:pic>
+        <p:nvPicPr>
+          <p:cNvPr id="4098" name="Picture 2"/>
+          <p:cNvPicPr>
+            <a:picLocks noChangeAspect="1" noChangeArrowheads="1"/>
+          </p:cNvPicPr>
+          <p:nvPr/>
+        </p:nvPicPr>
+        <p:blipFill>
+          <a:blip r:embed="rId2" cstate="print"/>
+          <a:srcRect/>
+          <a:stretch>
+            <a:fillRect/>
+          </a:stretch>
+        </p:blipFill>
+        <p:spPr bwMode="auto">
+          <a:xfrm>
+            <a:off x="755576" y="3356992"/>
+            <a:ext cx="7818011" cy="2880320"/>
+          </a:xfrm>
+          <a:prstGeom prst="rect">
+            <a:avLst/>
+          </a:prstGeom>
+          <a:noFill/>
+          <a:ln w="9525">
+            <a:noFill/>
+            <a:miter lim="800000"/>
+            <a:headEnd/>
+            <a:tailEnd/>
+          </a:ln>
+          <a:effectLst/>
+        </p:spPr>
+      </p:pic>
     </p:spTree>
   </p:cSld>
   <p:clrMapOvr>
@@ -3310,7 +4243,7 @@
         </p:blipFill>
         <p:spPr>
           <a:xfrm>
-            <a:off x="323528" y="1052736"/>
+            <a:off x="179512" y="1052736"/>
             <a:ext cx="8568952" cy="8568952"/>
           </a:xfrm>
           <a:prstGeom prst="rect">
@@ -3318,6 +4251,30 @@
           </a:prstGeom>
         </p:spPr>
       </p:pic>
+      <p:sp>
+        <p:nvSpPr>
+          <p:cNvPr id="5" name="Номер слайда 4"/>
+          <p:cNvSpPr>
+            <a:spLocks noGrp="1"/>
+          </p:cNvSpPr>
+          <p:nvPr>
+            <p:ph type="sldNum" sz="quarter" idx="12"/>
+          </p:nvPr>
+        </p:nvSpPr>
+        <p:spPr/>
+        <p:txBody>
+          <a:bodyPr/>
+          <a:lstStyle/>
+          <a:p>
+            <a:fld id="{8D0CB543-272A-46F8-AA1A-C85E29F11575}" type="slidenum">
+              <a:rPr lang="ru-RU" smtClean="0"/>
+              <a:pPr/>
+              <a:t>2</a:t>
+            </a:fld>
+            <a:endParaRPr lang="ru-RU"/>
+          </a:p>
+        </p:txBody>
+      </p:sp>
     </p:spTree>
   </p:cSld>
   <p:clrMapOvr>
@@ -3373,6 +4330,30 @@
           </a:ln>
         </p:spPr>
       </p:pic>
+      <p:sp>
+        <p:nvSpPr>
+          <p:cNvPr id="3" name="Номер слайда 2"/>
+          <p:cNvSpPr>
+            <a:spLocks noGrp="1"/>
+          </p:cNvSpPr>
+          <p:nvPr>
+            <p:ph type="sldNum" sz="quarter" idx="12"/>
+          </p:nvPr>
+        </p:nvSpPr>
+        <p:spPr/>
+        <p:txBody>
+          <a:bodyPr/>
+          <a:lstStyle/>
+          <a:p>
+            <a:fld id="{8D0CB543-272A-46F8-AA1A-C85E29F11575}" type="slidenum">
+              <a:rPr lang="ru-RU" smtClean="0"/>
+              <a:pPr/>
+              <a:t>3</a:t>
+            </a:fld>
+            <a:endParaRPr lang="ru-RU"/>
+          </a:p>
+        </p:txBody>
+      </p:sp>
     </p:spTree>
   </p:cSld>
   <p:clrMapOvr>
@@ -3428,6 +4409,30 @@
           </a:ln>
         </p:spPr>
       </p:pic>
+      <p:sp>
+        <p:nvSpPr>
+          <p:cNvPr id="3" name="Номер слайда 2"/>
+          <p:cNvSpPr>
+            <a:spLocks noGrp="1"/>
+          </p:cNvSpPr>
+          <p:nvPr>
+            <p:ph type="sldNum" sz="quarter" idx="12"/>
+          </p:nvPr>
+        </p:nvSpPr>
+        <p:spPr/>
+        <p:txBody>
+          <a:bodyPr/>
+          <a:lstStyle/>
+          <a:p>
+            <a:fld id="{8D0CB543-272A-46F8-AA1A-C85E29F11575}" type="slidenum">
+              <a:rPr lang="ru-RU" smtClean="0"/>
+              <a:pPr/>
+              <a:t>4</a:t>
+            </a:fld>
+            <a:endParaRPr lang="ru-RU"/>
+          </a:p>
+        </p:txBody>
+      </p:sp>
     </p:spTree>
   </p:cSld>
   <p:clrMapOvr>
@@ -3603,6 +4608,30 @@
           </a:ln>
         </p:spPr>
       </p:pic>
+      <p:sp>
+        <p:nvSpPr>
+          <p:cNvPr id="9" name="Номер слайда 8"/>
+          <p:cNvSpPr>
+            <a:spLocks noGrp="1"/>
+          </p:cNvSpPr>
+          <p:nvPr>
+            <p:ph type="sldNum" sz="quarter" idx="12"/>
+          </p:nvPr>
+        </p:nvSpPr>
+        <p:spPr/>
+        <p:txBody>
+          <a:bodyPr/>
+          <a:lstStyle/>
+          <a:p>
+            <a:fld id="{8D0CB543-272A-46F8-AA1A-C85E29F11575}" type="slidenum">
+              <a:rPr lang="ru-RU" smtClean="0"/>
+              <a:pPr/>
+              <a:t>5</a:t>
+            </a:fld>
+            <a:endParaRPr lang="ru-RU"/>
+          </a:p>
+        </p:txBody>
+      </p:sp>
     </p:spTree>
   </p:cSld>
   <p:clrMapOvr>
@@ -3658,6 +4687,30 @@
           </a:ln>
         </p:spPr>
       </p:pic>
+      <p:sp>
+        <p:nvSpPr>
+          <p:cNvPr id="3" name="Номер слайда 2"/>
+          <p:cNvSpPr>
+            <a:spLocks noGrp="1"/>
+          </p:cNvSpPr>
+          <p:nvPr>
+            <p:ph type="sldNum" sz="quarter" idx="12"/>
+          </p:nvPr>
+        </p:nvSpPr>
+        <p:spPr/>
+        <p:txBody>
+          <a:bodyPr/>
+          <a:lstStyle/>
+          <a:p>
+            <a:fld id="{8D0CB543-272A-46F8-AA1A-C85E29F11575}" type="slidenum">
+              <a:rPr lang="ru-RU" smtClean="0"/>
+              <a:pPr/>
+              <a:t>6</a:t>
+            </a:fld>
+            <a:endParaRPr lang="ru-RU"/>
+          </a:p>
+        </p:txBody>
+      </p:sp>
     </p:spTree>
   </p:cSld>
   <p:clrMapOvr>
@@ -3716,6 +4769,602 @@
           <a:effectLst/>
         </p:spPr>
       </p:pic>
+      <p:sp>
+        <p:nvSpPr>
+          <p:cNvPr id="3" name="Номер слайда 2"/>
+          <p:cNvSpPr>
+            <a:spLocks noGrp="1"/>
+          </p:cNvSpPr>
+          <p:nvPr>
+            <p:ph type="sldNum" sz="quarter" idx="12"/>
+          </p:nvPr>
+        </p:nvSpPr>
+        <p:spPr/>
+        <p:txBody>
+          <a:bodyPr/>
+          <a:lstStyle/>
+          <a:p>
+            <a:fld id="{8D0CB543-272A-46F8-AA1A-C85E29F11575}" type="slidenum">
+              <a:rPr lang="ru-RU" smtClean="0"/>
+              <a:pPr/>
+              <a:t>7</a:t>
+            </a:fld>
+            <a:endParaRPr lang="ru-RU"/>
+          </a:p>
+        </p:txBody>
+      </p:sp>
+    </p:spTree>
+  </p:cSld>
+  <p:clrMapOvr>
+    <a:masterClrMapping/>
+  </p:clrMapOvr>
+</p:sld>
+</file>
+
+<file path=ppt/slides/slide8.xml><?xml version="1.0" encoding="utf-8"?>
+<p:sld xmlns:a="http://schemas.openxmlformats.org/drawingml/2006/main" xmlns:r="http://schemas.openxmlformats.org/officeDocument/2006/relationships" xmlns:p="http://schemas.openxmlformats.org/presentationml/2006/main">
+  <p:cSld>
+    <p:spTree>
+      <p:nvGrpSpPr>
+        <p:cNvPr id="1" name=""/>
+        <p:cNvGrpSpPr/>
+        <p:nvPr/>
+      </p:nvGrpSpPr>
+      <p:grpSpPr>
+        <a:xfrm>
+          <a:off x="0" y="0"/>
+          <a:ext cx="0" cy="0"/>
+          <a:chOff x="0" y="0"/>
+          <a:chExt cx="0" cy="0"/>
+        </a:xfrm>
+      </p:grpSpPr>
+      <p:sp>
+        <p:nvSpPr>
+          <p:cNvPr id="4" name="Номер слайда 3"/>
+          <p:cNvSpPr>
+            <a:spLocks noGrp="1"/>
+          </p:cNvSpPr>
+          <p:nvPr>
+            <p:ph type="sldNum" sz="quarter" idx="12"/>
+          </p:nvPr>
+        </p:nvSpPr>
+        <p:spPr/>
+        <p:txBody>
+          <a:bodyPr/>
+          <a:lstStyle/>
+          <a:p>
+            <a:fld id="{8D0CB543-272A-46F8-AA1A-C85E29F11575}" type="slidenum">
+              <a:rPr lang="ru-RU" smtClean="0"/>
+              <a:pPr/>
+              <a:t>8</a:t>
+            </a:fld>
+            <a:endParaRPr lang="ru-RU"/>
+          </a:p>
+        </p:txBody>
+      </p:sp>
+      <p:sp>
+        <p:nvSpPr>
+          <p:cNvPr id="5" name="Прямоугольник 4"/>
+          <p:cNvSpPr/>
+          <p:nvPr/>
+        </p:nvSpPr>
+        <p:spPr>
+          <a:xfrm>
+            <a:off x="0" y="116632"/>
+            <a:ext cx="5112568" cy="5016758"/>
+          </a:xfrm>
+          <a:prstGeom prst="rect">
+            <a:avLst/>
+          </a:prstGeom>
+        </p:spPr>
+        <p:txBody>
+          <a:bodyPr wrap="square">
+            <a:spAutoFit/>
+          </a:bodyPr>
+          <a:lstStyle/>
+          <a:p>
+            <a:r>
+              <a:rPr lang="en-US" sz="3200" dirty="0" smtClean="0">
+                <a:latin typeface="Courier New" pitchFamily="49" charset="0"/>
+                <a:cs typeface="Courier New" pitchFamily="49" charset="0"/>
+              </a:rPr>
+              <a:t>"INSERT INTO public.\"Publishers\" (\"Name\", \"Address\", \"Contact\", \"Email\") " +</a:t>
+            </a:r>
+          </a:p>
+          <a:p>
+            <a:r>
+              <a:rPr lang="en-US" sz="3200" dirty="0" smtClean="0">
+                <a:latin typeface="Courier New" pitchFamily="49" charset="0"/>
+                <a:cs typeface="Courier New" pitchFamily="49" charset="0"/>
+              </a:rPr>
+              <a:t>                                   "VALUES (@Name, @Address, @Contact, @Email)"</a:t>
+            </a:r>
+            <a:endParaRPr lang="ru-RU" sz="3200" dirty="0">
+              <a:latin typeface="Courier New" pitchFamily="49" charset="0"/>
+              <a:cs typeface="Courier New" pitchFamily="49" charset="0"/>
+            </a:endParaRPr>
+          </a:p>
+        </p:txBody>
+      </p:sp>
+      <p:pic>
+        <p:nvPicPr>
+          <p:cNvPr id="1026" name="Picture 2"/>
+          <p:cNvPicPr>
+            <a:picLocks noChangeAspect="1" noChangeArrowheads="1"/>
+          </p:cNvPicPr>
+          <p:nvPr/>
+        </p:nvPicPr>
+        <p:blipFill>
+          <a:blip r:embed="rId2" cstate="print"/>
+          <a:srcRect/>
+          <a:stretch>
+            <a:fillRect/>
+          </a:stretch>
+        </p:blipFill>
+        <p:spPr bwMode="auto">
+          <a:xfrm>
+            <a:off x="4139952" y="1628800"/>
+            <a:ext cx="5004048" cy="2142069"/>
+          </a:xfrm>
+          <a:prstGeom prst="rect">
+            <a:avLst/>
+          </a:prstGeom>
+          <a:noFill/>
+          <a:ln w="9525">
+            <a:noFill/>
+            <a:miter lim="800000"/>
+            <a:headEnd/>
+            <a:tailEnd/>
+          </a:ln>
+          <a:effectLst/>
+        </p:spPr>
+      </p:pic>
+    </p:spTree>
+  </p:cSld>
+  <p:clrMapOvr>
+    <a:masterClrMapping/>
+  </p:clrMapOvr>
+</p:sld>
+</file>
+
+<file path=ppt/slides/slide9.xml><?xml version="1.0" encoding="utf-8"?>
+<p:sld xmlns:a="http://schemas.openxmlformats.org/drawingml/2006/main" xmlns:r="http://schemas.openxmlformats.org/officeDocument/2006/relationships" xmlns:p="http://schemas.openxmlformats.org/presentationml/2006/main">
+  <p:cSld>
+    <p:spTree>
+      <p:nvGrpSpPr>
+        <p:cNvPr id="1" name=""/>
+        <p:cNvGrpSpPr/>
+        <p:nvPr/>
+      </p:nvGrpSpPr>
+      <p:grpSpPr>
+        <a:xfrm>
+          <a:off x="0" y="0"/>
+          <a:ext cx="0" cy="0"/>
+          <a:chOff x="0" y="0"/>
+          <a:chExt cx="0" cy="0"/>
+        </a:xfrm>
+      </p:grpSpPr>
+      <p:sp>
+        <p:nvSpPr>
+          <p:cNvPr id="4" name="Номер слайда 3"/>
+          <p:cNvSpPr>
+            <a:spLocks noGrp="1"/>
+          </p:cNvSpPr>
+          <p:nvPr>
+            <p:ph type="sldNum" sz="quarter" idx="12"/>
+          </p:nvPr>
+        </p:nvSpPr>
+        <p:spPr/>
+        <p:txBody>
+          <a:bodyPr/>
+          <a:lstStyle/>
+          <a:p>
+            <a:fld id="{8D0CB543-272A-46F8-AA1A-C85E29F11575}" type="slidenum">
+              <a:rPr lang="ru-RU" smtClean="0"/>
+              <a:pPr/>
+              <a:t>9</a:t>
+            </a:fld>
+            <a:endParaRPr lang="ru-RU"/>
+          </a:p>
+        </p:txBody>
+      </p:sp>
+      <p:pic>
+        <p:nvPicPr>
+          <p:cNvPr id="2050" name="Picture 2"/>
+          <p:cNvPicPr>
+            <a:picLocks noChangeAspect="1" noChangeArrowheads="1"/>
+          </p:cNvPicPr>
+          <p:nvPr/>
+        </p:nvPicPr>
+        <p:blipFill>
+          <a:blip r:embed="rId2" cstate="print"/>
+          <a:srcRect/>
+          <a:stretch>
+            <a:fillRect/>
+          </a:stretch>
+        </p:blipFill>
+        <p:spPr bwMode="auto">
+          <a:xfrm>
+            <a:off x="4932040" y="3284984"/>
+            <a:ext cx="3517867" cy="3384376"/>
+          </a:xfrm>
+          <a:prstGeom prst="rect">
+            <a:avLst/>
+          </a:prstGeom>
+          <a:noFill/>
+          <a:ln w="9525">
+            <a:noFill/>
+            <a:miter lim="800000"/>
+            <a:headEnd/>
+            <a:tailEnd/>
+          </a:ln>
+          <a:effectLst/>
+        </p:spPr>
+      </p:pic>
+      <p:sp>
+        <p:nvSpPr>
+          <p:cNvPr id="6" name="Прямоугольник 5"/>
+          <p:cNvSpPr/>
+          <p:nvPr/>
+        </p:nvSpPr>
+        <p:spPr>
+          <a:xfrm>
+            <a:off x="0" y="0"/>
+            <a:ext cx="8388424" cy="4247317"/>
+          </a:xfrm>
+          <a:prstGeom prst="rect">
+            <a:avLst/>
+          </a:prstGeom>
+        </p:spPr>
+        <p:txBody>
+          <a:bodyPr wrap="square">
+            <a:spAutoFit/>
+          </a:bodyPr>
+          <a:lstStyle/>
+          <a:p>
+            <a:r>
+              <a:rPr lang="en-US" dirty="0" smtClean="0">
+                <a:latin typeface="Courier New" pitchFamily="49" charset="0"/>
+                <a:cs typeface="Courier New" pitchFamily="49" charset="0"/>
+              </a:rPr>
+              <a:t>SELECT </a:t>
+            </a:r>
+          </a:p>
+          <a:p>
+            <a:r>
+              <a:rPr lang="en-US" dirty="0" smtClean="0">
+                <a:latin typeface="Courier New" pitchFamily="49" charset="0"/>
+                <a:cs typeface="Courier New" pitchFamily="49" charset="0"/>
+              </a:rPr>
+              <a:t>       </a:t>
+            </a:r>
+            <a:r>
+              <a:rPr lang="en-US" dirty="0" smtClean="0">
+                <a:latin typeface="Courier New" pitchFamily="49" charset="0"/>
+                <a:cs typeface="Courier New" pitchFamily="49" charset="0"/>
+              </a:rPr>
+              <a:t>p</a:t>
+            </a:r>
+            <a:r>
+              <a:rPr lang="en-US" dirty="0" smtClean="0">
+                <a:latin typeface="Courier New" pitchFamily="49" charset="0"/>
+                <a:cs typeface="Courier New" pitchFamily="49" charset="0"/>
+              </a:rPr>
+              <a:t>.""Name"" AS ""</a:t>
+            </a:r>
+            <a:r>
+              <a:rPr lang="ru-RU" dirty="0" smtClean="0">
+                <a:latin typeface="Courier New" pitchFamily="49" charset="0"/>
+                <a:cs typeface="Courier New" pitchFamily="49" charset="0"/>
+              </a:rPr>
+              <a:t>Издательство"",</a:t>
+            </a:r>
+          </a:p>
+          <a:p>
+            <a:r>
+              <a:rPr lang="en-US" dirty="0" smtClean="0">
+                <a:latin typeface="Courier New" pitchFamily="49" charset="0"/>
+                <a:cs typeface="Courier New" pitchFamily="49" charset="0"/>
+              </a:rPr>
+              <a:t>	j</a:t>
+            </a:r>
+            <a:r>
+              <a:rPr lang="en-US" dirty="0" smtClean="0">
+                <a:latin typeface="Courier New" pitchFamily="49" charset="0"/>
+                <a:cs typeface="Courier New" pitchFamily="49" charset="0"/>
+              </a:rPr>
+              <a:t>.""Name"" AS ""</a:t>
+            </a:r>
+            <a:r>
+              <a:rPr lang="ru-RU" dirty="0" smtClean="0">
+                <a:latin typeface="Courier New" pitchFamily="49" charset="0"/>
+                <a:cs typeface="Courier New" pitchFamily="49" charset="0"/>
+              </a:rPr>
+              <a:t>Журнал</a:t>
+            </a:r>
+            <a:r>
+              <a:rPr lang="ru-RU" dirty="0" smtClean="0">
+                <a:latin typeface="Courier New" pitchFamily="49" charset="0"/>
+                <a:cs typeface="Courier New" pitchFamily="49" charset="0"/>
+              </a:rPr>
+              <a:t>"",                        COUNT</a:t>
+            </a:r>
+            <a:endParaRPr lang="en-US" dirty="0" smtClean="0">
+              <a:latin typeface="Courier New" pitchFamily="49" charset="0"/>
+              <a:cs typeface="Courier New" pitchFamily="49" charset="0"/>
+            </a:endParaRPr>
+          </a:p>
+          <a:p>
+            <a:r>
+              <a:rPr lang="en-US" dirty="0" smtClean="0">
+                <a:latin typeface="Courier New" pitchFamily="49" charset="0"/>
+                <a:cs typeface="Courier New" pitchFamily="49" charset="0"/>
+              </a:rPr>
+              <a:t>	</a:t>
+            </a:r>
+            <a:r>
+              <a:rPr lang="ru-RU" dirty="0" smtClean="0">
+                <a:latin typeface="Courier New" pitchFamily="49" charset="0"/>
+                <a:cs typeface="Courier New" pitchFamily="49" charset="0"/>
+              </a:rPr>
+              <a:t>(</a:t>
+            </a:r>
+            <a:r>
+              <a:rPr lang="ru-RU" dirty="0" err="1" smtClean="0">
+                <a:latin typeface="Courier New" pitchFamily="49" charset="0"/>
+                <a:cs typeface="Courier New" pitchFamily="49" charset="0"/>
+              </a:rPr>
+              <a:t>s</a:t>
+            </a:r>
+            <a:r>
+              <a:rPr lang="ru-RU" dirty="0" smtClean="0">
+                <a:latin typeface="Courier New" pitchFamily="49" charset="0"/>
+                <a:cs typeface="Courier New" pitchFamily="49" charset="0"/>
+              </a:rPr>
+              <a:t>.""</a:t>
+            </a:r>
+            <a:r>
+              <a:rPr lang="ru-RU" dirty="0" err="1" smtClean="0">
+                <a:latin typeface="Courier New" pitchFamily="49" charset="0"/>
+                <a:cs typeface="Courier New" pitchFamily="49" charset="0"/>
+              </a:rPr>
+              <a:t>journalID</a:t>
+            </a:r>
+            <a:r>
+              <a:rPr lang="ru-RU" dirty="0" smtClean="0">
+                <a:latin typeface="Courier New" pitchFamily="49" charset="0"/>
+                <a:cs typeface="Courier New" pitchFamily="49" charset="0"/>
+              </a:rPr>
+              <a:t>"") </a:t>
+            </a:r>
+            <a:r>
+              <a:rPr lang="ru-RU" dirty="0" smtClean="0">
+                <a:latin typeface="Courier New" pitchFamily="49" charset="0"/>
+                <a:cs typeface="Courier New" pitchFamily="49" charset="0"/>
+              </a:rPr>
+              <a:t>AS </a:t>
+            </a:r>
+            <a:r>
+              <a:rPr lang="ru-RU" dirty="0" smtClean="0">
+                <a:latin typeface="Courier New" pitchFamily="49" charset="0"/>
+                <a:cs typeface="Courier New" pitchFamily="49" charset="0"/>
+              </a:rPr>
+              <a:t>""</a:t>
+            </a:r>
+            <a:r>
+              <a:rPr lang="ru-RU" dirty="0" smtClean="0">
+                <a:latin typeface="Courier New" pitchFamily="49" charset="0"/>
+                <a:cs typeface="Courier New" pitchFamily="49" charset="0"/>
+              </a:rPr>
+              <a:t>Количество</a:t>
+            </a:r>
+            <a:r>
+              <a:rPr lang="en-US" dirty="0" smtClean="0">
+                <a:latin typeface="Courier New" pitchFamily="49" charset="0"/>
+                <a:cs typeface="Courier New" pitchFamily="49" charset="0"/>
+              </a:rPr>
+              <a:t> </a:t>
+            </a:r>
+            <a:r>
+              <a:rPr lang="ru-RU" dirty="0" smtClean="0">
+                <a:latin typeface="Courier New" pitchFamily="49" charset="0"/>
+                <a:cs typeface="Courier New" pitchFamily="49" charset="0"/>
+              </a:rPr>
+              <a:t>подписок</a:t>
+            </a:r>
+            <a:r>
+              <a:rPr lang="ru-RU" dirty="0" smtClean="0">
+                <a:latin typeface="Courier New" pitchFamily="49" charset="0"/>
+                <a:cs typeface="Courier New" pitchFamily="49" charset="0"/>
+              </a:rPr>
+              <a:t>""</a:t>
+            </a:r>
+          </a:p>
+          <a:p>
+            <a:r>
+              <a:rPr lang="en-US" dirty="0" smtClean="0">
+                <a:latin typeface="Courier New" pitchFamily="49" charset="0"/>
+                <a:cs typeface="Courier New" pitchFamily="49" charset="0"/>
+              </a:rPr>
+              <a:t>FROM </a:t>
+            </a:r>
+            <a:endParaRPr lang="en-US" dirty="0" smtClean="0">
+              <a:latin typeface="Courier New" pitchFamily="49" charset="0"/>
+              <a:cs typeface="Courier New" pitchFamily="49" charset="0"/>
+            </a:endParaRPr>
+          </a:p>
+          <a:p>
+            <a:r>
+              <a:rPr lang="en-US" dirty="0" smtClean="0">
+                <a:latin typeface="Courier New" pitchFamily="49" charset="0"/>
+                <a:cs typeface="Courier New" pitchFamily="49" charset="0"/>
+              </a:rPr>
+              <a:t>	public</a:t>
+            </a:r>
+            <a:r>
+              <a:rPr lang="en-US" dirty="0" smtClean="0">
+                <a:latin typeface="Courier New" pitchFamily="49" charset="0"/>
+                <a:cs typeface="Courier New" pitchFamily="49" charset="0"/>
+              </a:rPr>
+              <a:t>.""Subs"" s</a:t>
+            </a:r>
+          </a:p>
+          <a:p>
+            <a:r>
+              <a:rPr lang="en-US" dirty="0" smtClean="0">
+                <a:latin typeface="Courier New" pitchFamily="49" charset="0"/>
+                <a:cs typeface="Courier New" pitchFamily="49" charset="0"/>
+              </a:rPr>
+              <a:t>JOIN </a:t>
+            </a:r>
+            <a:endParaRPr lang="en-US" dirty="0" smtClean="0">
+              <a:latin typeface="Courier New" pitchFamily="49" charset="0"/>
+              <a:cs typeface="Courier New" pitchFamily="49" charset="0"/>
+            </a:endParaRPr>
+          </a:p>
+          <a:p>
+            <a:r>
+              <a:rPr lang="fr-FR" dirty="0" smtClean="0">
+                <a:latin typeface="Courier New" pitchFamily="49" charset="0"/>
+                <a:cs typeface="Courier New" pitchFamily="49" charset="0"/>
+              </a:rPr>
+              <a:t>	public</a:t>
+            </a:r>
+            <a:r>
+              <a:rPr lang="fr-FR" dirty="0" smtClean="0">
+                <a:latin typeface="Courier New" pitchFamily="49" charset="0"/>
+                <a:cs typeface="Courier New" pitchFamily="49" charset="0"/>
+              </a:rPr>
+              <a:t>.""Journals"" j ON s.""journalID"" = j.id</a:t>
+            </a:r>
+          </a:p>
+          <a:p>
+            <a:r>
+              <a:rPr lang="en-US" dirty="0" smtClean="0">
+                <a:latin typeface="Courier New" pitchFamily="49" charset="0"/>
+                <a:cs typeface="Courier New" pitchFamily="49" charset="0"/>
+              </a:rPr>
+              <a:t>JOIN </a:t>
+            </a:r>
+            <a:endParaRPr lang="en-US" dirty="0" smtClean="0">
+              <a:latin typeface="Courier New" pitchFamily="49" charset="0"/>
+              <a:cs typeface="Courier New" pitchFamily="49" charset="0"/>
+            </a:endParaRPr>
+          </a:p>
+          <a:p>
+            <a:r>
+              <a:rPr lang="en-US" dirty="0" smtClean="0">
+                <a:latin typeface="Courier New" pitchFamily="49" charset="0"/>
+                <a:cs typeface="Courier New" pitchFamily="49" charset="0"/>
+              </a:rPr>
+              <a:t>	public</a:t>
+            </a:r>
+            <a:r>
+              <a:rPr lang="en-US" dirty="0" smtClean="0">
+                <a:latin typeface="Courier New" pitchFamily="49" charset="0"/>
+                <a:cs typeface="Courier New" pitchFamily="49" charset="0"/>
+              </a:rPr>
+              <a:t>.""Publishers"" p ON j.""</a:t>
+            </a:r>
+            <a:r>
+              <a:rPr lang="en-US" dirty="0" err="1" smtClean="0">
+                <a:latin typeface="Courier New" pitchFamily="49" charset="0"/>
+                <a:cs typeface="Courier New" pitchFamily="49" charset="0"/>
+              </a:rPr>
+              <a:t>PublisherID</a:t>
+            </a:r>
+            <a:r>
+              <a:rPr lang="en-US" dirty="0" smtClean="0">
+                <a:latin typeface="Courier New" pitchFamily="49" charset="0"/>
+                <a:cs typeface="Courier New" pitchFamily="49" charset="0"/>
+              </a:rPr>
+              <a:t>"" = p.id</a:t>
+            </a:r>
+          </a:p>
+          <a:p>
+            <a:r>
+              <a:rPr lang="en-US" dirty="0" smtClean="0">
+                <a:latin typeface="Courier New" pitchFamily="49" charset="0"/>
+                <a:cs typeface="Courier New" pitchFamily="49" charset="0"/>
+              </a:rPr>
+              <a:t>GROUP </a:t>
+            </a:r>
+            <a:r>
+              <a:rPr lang="en-US" dirty="0" smtClean="0">
+                <a:latin typeface="Courier New" pitchFamily="49" charset="0"/>
+                <a:cs typeface="Courier New" pitchFamily="49" charset="0"/>
+              </a:rPr>
+              <a:t>BY </a:t>
+            </a:r>
+          </a:p>
+          <a:p>
+            <a:r>
+              <a:rPr lang="en-US" dirty="0" smtClean="0">
+                <a:latin typeface="Courier New" pitchFamily="49" charset="0"/>
+                <a:cs typeface="Courier New" pitchFamily="49" charset="0"/>
+              </a:rPr>
+              <a:t>	p</a:t>
+            </a:r>
+            <a:r>
+              <a:rPr lang="en-US" dirty="0" smtClean="0">
+                <a:latin typeface="Courier New" pitchFamily="49" charset="0"/>
+                <a:cs typeface="Courier New" pitchFamily="49" charset="0"/>
+              </a:rPr>
+              <a:t>.""Name"", j.""Name""</a:t>
+            </a:r>
+          </a:p>
+          <a:p>
+            <a:r>
+              <a:rPr lang="en-US" dirty="0" smtClean="0">
+                <a:latin typeface="Courier New" pitchFamily="49" charset="0"/>
+                <a:cs typeface="Courier New" pitchFamily="49" charset="0"/>
+              </a:rPr>
+              <a:t>ORDER </a:t>
+            </a:r>
+            <a:r>
+              <a:rPr lang="en-US" dirty="0" smtClean="0">
+                <a:latin typeface="Courier New" pitchFamily="49" charset="0"/>
+                <a:cs typeface="Courier New" pitchFamily="49" charset="0"/>
+              </a:rPr>
+              <a:t>BY </a:t>
+            </a:r>
+          </a:p>
+          <a:p>
+            <a:r>
+              <a:rPr lang="en-US" dirty="0" smtClean="0">
+                <a:latin typeface="Courier New" pitchFamily="49" charset="0"/>
+                <a:cs typeface="Courier New" pitchFamily="49" charset="0"/>
+              </a:rPr>
+              <a:t>	COUNT(s</a:t>
+            </a:r>
+            <a:r>
+              <a:rPr lang="en-US" dirty="0" smtClean="0">
+                <a:latin typeface="Courier New" pitchFamily="49" charset="0"/>
+                <a:cs typeface="Courier New" pitchFamily="49" charset="0"/>
+              </a:rPr>
+              <a:t>.""</a:t>
+            </a:r>
+            <a:r>
+              <a:rPr lang="en-US" dirty="0" err="1" smtClean="0">
+                <a:latin typeface="Courier New" pitchFamily="49" charset="0"/>
+                <a:cs typeface="Courier New" pitchFamily="49" charset="0"/>
+              </a:rPr>
+              <a:t>journalID</a:t>
+            </a:r>
+            <a:r>
+              <a:rPr lang="en-US" dirty="0" smtClean="0">
+                <a:latin typeface="Courier New" pitchFamily="49" charset="0"/>
+                <a:cs typeface="Courier New" pitchFamily="49" charset="0"/>
+              </a:rPr>
+              <a:t>"") DESC;</a:t>
+            </a:r>
+            <a:endParaRPr lang="ru-RU" dirty="0">
+              <a:latin typeface="Courier New" pitchFamily="49" charset="0"/>
+              <a:cs typeface="Courier New" pitchFamily="49" charset="0"/>
+            </a:endParaRPr>
+          </a:p>
+        </p:txBody>
+      </p:sp>
     </p:spTree>
   </p:cSld>
   <p:clrMapOvr>
@@ -4005,4 +5654,287 @@
   <a:objectDefaults/>
   <a:extraClrSchemeLst/>
 </a:theme>
+</file>
+
+<file path=ppt/theme/theme2.xml><?xml version="1.0" encoding="utf-8"?>
+<a:theme xmlns:a="http://schemas.openxmlformats.org/drawingml/2006/main" name="Тема Office">
+  <a:themeElements>
+    <a:clrScheme name="Стандартная">
+      <a:dk1>
+        <a:sysClr val="windowText" lastClr="000000"/>
+      </a:dk1>
+      <a:lt1>
+        <a:sysClr val="window" lastClr="FFFFFF"/>
+      </a:lt1>
+      <a:dk2>
+        <a:srgbClr val="1F497D"/>
+      </a:dk2>
+      <a:lt2>
+        <a:srgbClr val="EEECE1"/>
+      </a:lt2>
+      <a:accent1>
+        <a:srgbClr val="4F81BD"/>
+      </a:accent1>
+      <a:accent2>
+        <a:srgbClr val="C0504D"/>
+      </a:accent2>
+      <a:accent3>
+        <a:srgbClr val="9BBB59"/>
+      </a:accent3>
+      <a:accent4>
+        <a:srgbClr val="8064A2"/>
+      </a:accent4>
+      <a:accent5>
+        <a:srgbClr val="4BACC6"/>
+      </a:accent5>
+      <a:accent6>
+        <a:srgbClr val="F79646"/>
+      </a:accent6>
+      <a:hlink>
+        <a:srgbClr val="0000FF"/>
+      </a:hlink>
+      <a:folHlink>
+        <a:srgbClr val="800080"/>
+      </a:folHlink>
+    </a:clrScheme>
+    <a:fontScheme name="Стандартная">
+      <a:majorFont>
+        <a:latin typeface="Calibri"/>
+        <a:ea typeface=""/>
+        <a:cs typeface=""/>
+        <a:font script="Jpan" typeface="ＭＳ Ｐゴシック"/>
+        <a:font script="Hang" typeface="맑은 고딕"/>
+        <a:font script="Hans" typeface="宋体"/>
+        <a:font script="Hant" typeface="新細明體"/>
+        <a:font script="Arab" typeface="Times New Roman"/>
+        <a:font script="Hebr" typeface="Times New Roman"/>
+        <a:font script="Thai" typeface="Angsana New"/>
+        <a:font script="Ethi" typeface="Nyala"/>
+        <a:font script="Beng" typeface="Vrinda"/>
+        <a:font script="Gujr" typeface="Shruti"/>
+        <a:font script="Khmr" typeface="MoolBoran"/>
+        <a:font script="Knda" typeface="Tunga"/>
+        <a:font script="Guru" typeface="Raavi"/>
+        <a:font script="Cans" typeface="Euphemia"/>
+        <a:font script="Cher" typeface="Plantagenet Cherokee"/>
+        <a:font script="Yiii" typeface="Microsoft Yi Baiti"/>
+        <a:font script="Tibt" typeface="Microsoft Himalaya"/>
+        <a:font script="Thaa" typeface="MV Boli"/>
+        <a:font script="Deva" typeface="Mangal"/>
+        <a:font script="Telu" typeface="Gautami"/>
+        <a:font script="Taml" typeface="Latha"/>
+        <a:font script="Syrc" typeface="Estrangelo Edessa"/>
+        <a:font script="Orya" typeface="Kalinga"/>
+        <a:font script="Mlym" typeface="Kartika"/>
+        <a:font script="Laoo" typeface="DokChampa"/>
+        <a:font script="Sinh" typeface="Iskoola Pota"/>
+        <a:font script="Mong" typeface="Mongolian Baiti"/>
+        <a:font script="Viet" typeface="Times New Roman"/>
+        <a:font script="Uigh" typeface="Microsoft Uighur"/>
+      </a:majorFont>
+      <a:minorFont>
+        <a:latin typeface="Calibri"/>
+        <a:ea typeface=""/>
+        <a:cs typeface=""/>
+        <a:font script="Jpan" typeface="ＭＳ Ｐゴシック"/>
+        <a:font script="Hang" typeface="맑은 고딕"/>
+        <a:font script="Hans" typeface="宋体"/>
+        <a:font script="Hant" typeface="新細明體"/>
+        <a:font script="Arab" typeface="Arial"/>
+        <a:font script="Hebr" typeface="Arial"/>
+        <a:font script="Thai" typeface="Cordia New"/>
+        <a:font script="Ethi" typeface="Nyala"/>
+        <a:font script="Beng" typeface="Vrinda"/>
+        <a:font script="Gujr" typeface="Shruti"/>
+        <a:font script="Khmr" typeface="DaunPenh"/>
+        <a:font script="Knda" typeface="Tunga"/>
+        <a:font script="Guru" typeface="Raavi"/>
+        <a:font script="Cans" typeface="Euphemia"/>
+        <a:font script="Cher" typeface="Plantagenet Cherokee"/>
+        <a:font script="Yiii" typeface="Microsoft Yi Baiti"/>
+        <a:font script="Tibt" typeface="Microsoft Himalaya"/>
+        <a:font script="Thaa" typeface="MV Boli"/>
+        <a:font script="Deva" typeface="Mangal"/>
+        <a:font script="Telu" typeface="Gautami"/>
+        <a:font script="Taml" typeface="Latha"/>
+        <a:font script="Syrc" typeface="Estrangelo Edessa"/>
+        <a:font script="Orya" typeface="Kalinga"/>
+        <a:font script="Mlym" typeface="Kartika"/>
+        <a:font script="Laoo" typeface="DokChampa"/>
+        <a:font script="Sinh" typeface="Iskoola Pota"/>
+        <a:font script="Mong" typeface="Mongolian Baiti"/>
+        <a:font script="Viet" typeface="Arial"/>
+        <a:font script="Uigh" typeface="Microsoft Uighur"/>
+      </a:minorFont>
+    </a:fontScheme>
+    <a:fmtScheme name="Стандартная">
+      <a:fillStyleLst>
+        <a:solidFill>
+          <a:schemeClr val="phClr"/>
+        </a:solidFill>
+        <a:gradFill rotWithShape="1">
+          <a:gsLst>
+            <a:gs pos="0">
+              <a:schemeClr val="phClr">
+                <a:tint val="50000"/>
+                <a:satMod val="300000"/>
+              </a:schemeClr>
+            </a:gs>
+            <a:gs pos="35000">
+              <a:schemeClr val="phClr">
+                <a:tint val="37000"/>
+                <a:satMod val="300000"/>
+              </a:schemeClr>
+            </a:gs>
+            <a:gs pos="100000">
+              <a:schemeClr val="phClr">
+                <a:tint val="15000"/>
+                <a:satMod val="350000"/>
+              </a:schemeClr>
+            </a:gs>
+          </a:gsLst>
+          <a:lin ang="16200000" scaled="1"/>
+        </a:gradFill>
+        <a:gradFill rotWithShape="1">
+          <a:gsLst>
+            <a:gs pos="0">
+              <a:schemeClr val="phClr">
+                <a:shade val="51000"/>
+                <a:satMod val="130000"/>
+              </a:schemeClr>
+            </a:gs>
+            <a:gs pos="80000">
+              <a:schemeClr val="phClr">
+                <a:shade val="93000"/>
+                <a:satMod val="130000"/>
+              </a:schemeClr>
+            </a:gs>
+            <a:gs pos="100000">
+              <a:schemeClr val="phClr">
+                <a:shade val="94000"/>
+                <a:satMod val="135000"/>
+              </a:schemeClr>
+            </a:gs>
+          </a:gsLst>
+          <a:lin ang="16200000" scaled="0"/>
+        </a:gradFill>
+      </a:fillStyleLst>
+      <a:lnStyleLst>
+        <a:ln w="9525" cap="flat" cmpd="sng" algn="ctr">
+          <a:solidFill>
+            <a:schemeClr val="phClr">
+              <a:shade val="95000"/>
+              <a:satMod val="105000"/>
+            </a:schemeClr>
+          </a:solidFill>
+          <a:prstDash val="solid"/>
+        </a:ln>
+        <a:ln w="25400" cap="flat" cmpd="sng" algn="ctr">
+          <a:solidFill>
+            <a:schemeClr val="phClr"/>
+          </a:solidFill>
+          <a:prstDash val="solid"/>
+        </a:ln>
+        <a:ln w="38100" cap="flat" cmpd="sng" algn="ctr">
+          <a:solidFill>
+            <a:schemeClr val="phClr"/>
+          </a:solidFill>
+          <a:prstDash val="solid"/>
+        </a:ln>
+      </a:lnStyleLst>
+      <a:effectStyleLst>
+        <a:effectStyle>
+          <a:effectLst>
+            <a:outerShdw blurRad="40000" dist="20000" dir="5400000" rotWithShape="0">
+              <a:srgbClr val="000000">
+                <a:alpha val="38000"/>
+              </a:srgbClr>
+            </a:outerShdw>
+          </a:effectLst>
+        </a:effectStyle>
+        <a:effectStyle>
+          <a:effectLst>
+            <a:outerShdw blurRad="40000" dist="23000" dir="5400000" rotWithShape="0">
+              <a:srgbClr val="000000">
+                <a:alpha val="35000"/>
+              </a:srgbClr>
+            </a:outerShdw>
+          </a:effectLst>
+        </a:effectStyle>
+        <a:effectStyle>
+          <a:effectLst>
+            <a:outerShdw blurRad="40000" dist="23000" dir="5400000" rotWithShape="0">
+              <a:srgbClr val="000000">
+                <a:alpha val="35000"/>
+              </a:srgbClr>
+            </a:outerShdw>
+          </a:effectLst>
+          <a:scene3d>
+            <a:camera prst="orthographicFront">
+              <a:rot lat="0" lon="0" rev="0"/>
+            </a:camera>
+            <a:lightRig rig="threePt" dir="t">
+              <a:rot lat="0" lon="0" rev="1200000"/>
+            </a:lightRig>
+          </a:scene3d>
+          <a:sp3d>
+            <a:bevelT w="63500" h="25400"/>
+          </a:sp3d>
+        </a:effectStyle>
+      </a:effectStyleLst>
+      <a:bgFillStyleLst>
+        <a:solidFill>
+          <a:schemeClr val="phClr"/>
+        </a:solidFill>
+        <a:gradFill rotWithShape="1">
+          <a:gsLst>
+            <a:gs pos="0">
+              <a:schemeClr val="phClr">
+                <a:tint val="40000"/>
+                <a:satMod val="350000"/>
+              </a:schemeClr>
+            </a:gs>
+            <a:gs pos="40000">
+              <a:schemeClr val="phClr">
+                <a:tint val="45000"/>
+                <a:shade val="99000"/>
+                <a:satMod val="350000"/>
+              </a:schemeClr>
+            </a:gs>
+            <a:gs pos="100000">
+              <a:schemeClr val="phClr">
+                <a:shade val="20000"/>
+                <a:satMod val="255000"/>
+              </a:schemeClr>
+            </a:gs>
+          </a:gsLst>
+          <a:path path="circle">
+            <a:fillToRect l="50000" t="-80000" r="50000" b="180000"/>
+          </a:path>
+        </a:gradFill>
+        <a:gradFill rotWithShape="1">
+          <a:gsLst>
+            <a:gs pos="0">
+              <a:schemeClr val="phClr">
+                <a:tint val="80000"/>
+                <a:satMod val="300000"/>
+              </a:schemeClr>
+            </a:gs>
+            <a:gs pos="100000">
+              <a:schemeClr val="phClr">
+                <a:shade val="30000"/>
+                <a:satMod val="200000"/>
+              </a:schemeClr>
+            </a:gs>
+          </a:gsLst>
+          <a:path path="circle">
+            <a:fillToRect l="50000" t="50000" r="50000" b="50000"/>
+          </a:path>
+        </a:gradFill>
+      </a:bgFillStyleLst>
+    </a:fmtScheme>
+  </a:themeElements>
+  <a:objectDefaults/>
+  <a:extraClrSchemeLst/>
+</a:theme>
 </file>